--- a/7th Semester/CCE-417_Data Warehousing & Mining/Murad sir/Chi_Square_Test_Real_Examples_19_6_25_with_calculation19_6_25.pptx
+++ b/7th Semester/CCE-417_Data Warehousing & Mining/Murad sir/Chi_Square_Test_Real_Examples_19_6_25_with_calculation19_6_25.pptx
@@ -1,19 +1,19 @@
 
 <file path=ppt/presentation.xml><?xml version="1.0" encoding="utf-8"?>
-<p:presentation xmlns:a="http://schemas.openxmlformats.org/drawingml/2006/main" xmlns:r="http://schemas.openxmlformats.org/officeDocument/2006/relationships" xmlns:p="http://schemas.openxmlformats.org/presentationml/2006/main" saveSubsetFonts="1" autoCompressPictures="0">
+<p:presentation xmlns:a="http://schemas.openxmlformats.org/drawingml/2006/main" xmlns:r="http://schemas.openxmlformats.org/officeDocument/2006/relationships" xmlns:p="http://schemas.openxmlformats.org/presentationml/2006/main" autoCompressPictures="0">
   <p:sldMasterIdLst>
     <p:sldMasterId id="2147483648" r:id="rId1"/>
   </p:sldMasterIdLst>
   <p:sldIdLst>
-    <p:sldId id="256" r:id="rId2"/>
-    <p:sldId id="257" r:id="rId3"/>
-    <p:sldId id="261" r:id="rId4"/>
-    <p:sldId id="258" r:id="rId5"/>
-    <p:sldId id="262" r:id="rId6"/>
-    <p:sldId id="259" r:id="rId7"/>
-    <p:sldId id="263" r:id="rId8"/>
-    <p:sldId id="260" r:id="rId9"/>
-    <p:sldId id="264" r:id="rId10"/>
+    <p:sldId id="256" r:id="rId3"/>
+    <p:sldId id="257" r:id="rId4"/>
+    <p:sldId id="261" r:id="rId5"/>
+    <p:sldId id="258" r:id="rId6"/>
+    <p:sldId id="262" r:id="rId7"/>
+    <p:sldId id="259" r:id="rId8"/>
+    <p:sldId id="263" r:id="rId9"/>
+    <p:sldId id="260" r:id="rId10"/>
+    <p:sldId id="264" r:id="rId11"/>
   </p:sldIdLst>
   <p:sldSz cx="9144000" cy="6858000" type="screen4x3"/>
   <p:notesSz cx="6858000" cy="9144000"/>
@@ -112,6 +112,22 @@
       </a:defRPr>
     </a:lvl9pPr>
   </p:defaultTextStyle>
+  <p:extLst>
+    <p:ext uri="{EFAFB233-063F-42B5-8137-9DF3F51BA10A}">
+      <p15:sldGuideLst xmlns:p15="http://schemas.microsoft.com/office/powerpoint/2012/main">
+        <p15:guide id="1" orient="horz" pos="2160" userDrawn="1">
+          <p15:clr>
+            <a:srgbClr val="A4A3A4"/>
+          </p15:clr>
+        </p15:guide>
+        <p15:guide id="2" pos="2880" userDrawn="1">
+          <p15:clr>
+            <a:srgbClr val="A4A3A4"/>
+          </p15:clr>
+        </p15:guide>
+      </p15:sldGuideLst>
+    </p:ext>
+  </p:extLst>
 </p:presentation>
 </file>
 
@@ -296,8 +312,6 @@
           <a:p>
             <a:fld id="{5BCAD085-E8A6-8845-BD4E-CB4CCA059FC4}" type="datetimeFigureOut">
               <a:rPr lang="en-US" smtClean="0"/>
-              <a:pPr/>
-              <a:t>19-Jun-25</a:t>
             </a:fld>
             <a:endParaRPr lang="en-US"/>
           </a:p>
@@ -339,19 +353,12 @@
           <a:p>
             <a:fld id="{C1FF6DA9-008F-8B48-92A6-B652298478BF}" type="slidenum">
               <a:rPr lang="en-US" smtClean="0"/>
-              <a:pPr/>
-              <a:t>‹#›</a:t>
             </a:fld>
             <a:endParaRPr lang="en-US"/>
           </a:p>
         </p:txBody>
       </p:sp>
     </p:spTree>
-    <p:extLst>
-      <p:ext uri="{BB962C8B-B14F-4D97-AF65-F5344CB8AC3E}">
-        <p14:creationId xmlns:p14="http://schemas.microsoft.com/office/powerpoint/2010/main" xmlns="" val="3168075583"/>
-      </p:ext>
-    </p:extLst>
   </p:cSld>
   <p:clrMapOvr>
     <a:masterClrMapping/>
@@ -419,6 +426,7 @@
               <a:rPr lang="en-US" smtClean="0"/>
               <a:t>Click to edit Master text styles</a:t>
             </a:r>
+            <a:endParaRPr lang="en-US" smtClean="0"/>
           </a:p>
           <a:p>
             <a:pPr lvl="1"/>
@@ -426,6 +434,7 @@
               <a:rPr lang="en-US" smtClean="0"/>
               <a:t>Second level</a:t>
             </a:r>
+            <a:endParaRPr lang="en-US" smtClean="0"/>
           </a:p>
           <a:p>
             <a:pPr lvl="2"/>
@@ -433,6 +442,7 @@
               <a:rPr lang="en-US" smtClean="0"/>
               <a:t>Third level</a:t>
             </a:r>
+            <a:endParaRPr lang="en-US" smtClean="0"/>
           </a:p>
           <a:p>
             <a:pPr lvl="3"/>
@@ -440,6 +450,7 @@
               <a:rPr lang="en-US" smtClean="0"/>
               <a:t>Fourth level</a:t>
             </a:r>
+            <a:endParaRPr lang="en-US" smtClean="0"/>
           </a:p>
           <a:p>
             <a:pPr lvl="4"/>
@@ -468,8 +479,6 @@
           <a:p>
             <a:fld id="{5BCAD085-E8A6-8845-BD4E-CB4CCA059FC4}" type="datetimeFigureOut">
               <a:rPr lang="en-US" smtClean="0"/>
-              <a:pPr/>
-              <a:t>19-Jun-25</a:t>
             </a:fld>
             <a:endParaRPr lang="en-US"/>
           </a:p>
@@ -511,19 +520,12 @@
           <a:p>
             <a:fld id="{C1FF6DA9-008F-8B48-92A6-B652298478BF}" type="slidenum">
               <a:rPr lang="en-US" smtClean="0"/>
-              <a:pPr/>
-              <a:t>‹#›</a:t>
             </a:fld>
             <a:endParaRPr lang="en-US"/>
           </a:p>
         </p:txBody>
       </p:sp>
     </p:spTree>
-    <p:extLst>
-      <p:ext uri="{BB962C8B-B14F-4D97-AF65-F5344CB8AC3E}">
-        <p14:creationId xmlns:p14="http://schemas.microsoft.com/office/powerpoint/2010/main" xmlns="" val="2910927964"/>
-      </p:ext>
-    </p:extLst>
   </p:cSld>
   <p:clrMapOvr>
     <a:masterClrMapping/>
@@ -601,6 +603,7 @@
               <a:rPr lang="en-US" smtClean="0"/>
               <a:t>Click to edit Master text styles</a:t>
             </a:r>
+            <a:endParaRPr lang="en-US" smtClean="0"/>
           </a:p>
           <a:p>
             <a:pPr lvl="1"/>
@@ -608,6 +611,7 @@
               <a:rPr lang="en-US" smtClean="0"/>
               <a:t>Second level</a:t>
             </a:r>
+            <a:endParaRPr lang="en-US" smtClean="0"/>
           </a:p>
           <a:p>
             <a:pPr lvl="2"/>
@@ -615,6 +619,7 @@
               <a:rPr lang="en-US" smtClean="0"/>
               <a:t>Third level</a:t>
             </a:r>
+            <a:endParaRPr lang="en-US" smtClean="0"/>
           </a:p>
           <a:p>
             <a:pPr lvl="3"/>
@@ -622,6 +627,7 @@
               <a:rPr lang="en-US" smtClean="0"/>
               <a:t>Fourth level</a:t>
             </a:r>
+            <a:endParaRPr lang="en-US" smtClean="0"/>
           </a:p>
           <a:p>
             <a:pPr lvl="4"/>
@@ -650,8 +656,6 @@
           <a:p>
             <a:fld id="{5BCAD085-E8A6-8845-BD4E-CB4CCA059FC4}" type="datetimeFigureOut">
               <a:rPr lang="en-US" smtClean="0"/>
-              <a:pPr/>
-              <a:t>19-Jun-25</a:t>
             </a:fld>
             <a:endParaRPr lang="en-US"/>
           </a:p>
@@ -693,19 +697,12 @@
           <a:p>
             <a:fld id="{C1FF6DA9-008F-8B48-92A6-B652298478BF}" type="slidenum">
               <a:rPr lang="en-US" smtClean="0"/>
-              <a:pPr/>
-              <a:t>‹#›</a:t>
             </a:fld>
             <a:endParaRPr lang="en-US"/>
           </a:p>
         </p:txBody>
       </p:sp>
     </p:spTree>
-    <p:extLst>
-      <p:ext uri="{BB962C8B-B14F-4D97-AF65-F5344CB8AC3E}">
-        <p14:creationId xmlns:p14="http://schemas.microsoft.com/office/powerpoint/2010/main" xmlns="" val="3612223792"/>
-      </p:ext>
-    </p:extLst>
   </p:cSld>
   <p:clrMapOvr>
     <a:masterClrMapping/>
@@ -773,6 +770,7 @@
               <a:rPr lang="en-US" smtClean="0"/>
               <a:t>Click to edit Master text styles</a:t>
             </a:r>
+            <a:endParaRPr lang="en-US" smtClean="0"/>
           </a:p>
           <a:p>
             <a:pPr lvl="1"/>
@@ -780,6 +778,7 @@
               <a:rPr lang="en-US" smtClean="0"/>
               <a:t>Second level</a:t>
             </a:r>
+            <a:endParaRPr lang="en-US" smtClean="0"/>
           </a:p>
           <a:p>
             <a:pPr lvl="2"/>
@@ -787,6 +786,7 @@
               <a:rPr lang="en-US" smtClean="0"/>
               <a:t>Third level</a:t>
             </a:r>
+            <a:endParaRPr lang="en-US" smtClean="0"/>
           </a:p>
           <a:p>
             <a:pPr lvl="3"/>
@@ -794,6 +794,7 @@
               <a:rPr lang="en-US" smtClean="0"/>
               <a:t>Fourth level</a:t>
             </a:r>
+            <a:endParaRPr lang="en-US" smtClean="0"/>
           </a:p>
           <a:p>
             <a:pPr lvl="4"/>
@@ -822,8 +823,6 @@
           <a:p>
             <a:fld id="{5BCAD085-E8A6-8845-BD4E-CB4CCA059FC4}" type="datetimeFigureOut">
               <a:rPr lang="en-US" smtClean="0"/>
-              <a:pPr/>
-              <a:t>19-Jun-25</a:t>
             </a:fld>
             <a:endParaRPr lang="en-US"/>
           </a:p>
@@ -865,19 +864,12 @@
           <a:p>
             <a:fld id="{C1FF6DA9-008F-8B48-92A6-B652298478BF}" type="slidenum">
               <a:rPr lang="en-US" smtClean="0"/>
-              <a:pPr/>
-              <a:t>‹#›</a:t>
             </a:fld>
             <a:endParaRPr lang="en-US"/>
           </a:p>
         </p:txBody>
       </p:sp>
     </p:spTree>
-    <p:extLst>
-      <p:ext uri="{BB962C8B-B14F-4D97-AF65-F5344CB8AC3E}">
-        <p14:creationId xmlns:p14="http://schemas.microsoft.com/office/powerpoint/2010/main" xmlns="" val="2614314258"/>
-      </p:ext>
-    </p:extLst>
   </p:cSld>
   <p:clrMapOvr>
     <a:masterClrMapping/>
@@ -1050,6 +1042,7 @@
               <a:rPr lang="en-US" smtClean="0"/>
               <a:t>Click to edit Master text styles</a:t>
             </a:r>
+            <a:endParaRPr lang="en-US" smtClean="0"/>
           </a:p>
         </p:txBody>
       </p:sp>
@@ -1070,8 +1063,6 @@
           <a:p>
             <a:fld id="{5BCAD085-E8A6-8845-BD4E-CB4CCA059FC4}" type="datetimeFigureOut">
               <a:rPr lang="en-US" smtClean="0"/>
-              <a:pPr/>
-              <a:t>19-Jun-25</a:t>
             </a:fld>
             <a:endParaRPr lang="en-US"/>
           </a:p>
@@ -1113,19 +1104,12 @@
           <a:p>
             <a:fld id="{C1FF6DA9-008F-8B48-92A6-B652298478BF}" type="slidenum">
               <a:rPr lang="en-US" smtClean="0"/>
-              <a:pPr/>
-              <a:t>‹#›</a:t>
             </a:fld>
             <a:endParaRPr lang="en-US"/>
           </a:p>
         </p:txBody>
       </p:sp>
     </p:spTree>
-    <p:extLst>
-      <p:ext uri="{BB962C8B-B14F-4D97-AF65-F5344CB8AC3E}">
-        <p14:creationId xmlns:p14="http://schemas.microsoft.com/office/powerpoint/2010/main" xmlns="" val="960648375"/>
-      </p:ext>
-    </p:extLst>
   </p:cSld>
   <p:clrMapOvr>
     <a:masterClrMapping/>
@@ -1226,6 +1210,7 @@
               <a:rPr lang="en-US" smtClean="0"/>
               <a:t>Click to edit Master text styles</a:t>
             </a:r>
+            <a:endParaRPr lang="en-US" smtClean="0"/>
           </a:p>
           <a:p>
             <a:pPr lvl="1"/>
@@ -1233,6 +1218,7 @@
               <a:rPr lang="en-US" smtClean="0"/>
               <a:t>Second level</a:t>
             </a:r>
+            <a:endParaRPr lang="en-US" smtClean="0"/>
           </a:p>
           <a:p>
             <a:pPr lvl="2"/>
@@ -1240,6 +1226,7 @@
               <a:rPr lang="en-US" smtClean="0"/>
               <a:t>Third level</a:t>
             </a:r>
+            <a:endParaRPr lang="en-US" smtClean="0"/>
           </a:p>
           <a:p>
             <a:pPr lvl="3"/>
@@ -1247,6 +1234,7 @@
               <a:rPr lang="en-US" smtClean="0"/>
               <a:t>Fourth level</a:t>
             </a:r>
+            <a:endParaRPr lang="en-US" smtClean="0"/>
           </a:p>
           <a:p>
             <a:pPr lvl="4"/>
@@ -1311,6 +1299,7 @@
               <a:rPr lang="en-US" smtClean="0"/>
               <a:t>Click to edit Master text styles</a:t>
             </a:r>
+            <a:endParaRPr lang="en-US" smtClean="0"/>
           </a:p>
           <a:p>
             <a:pPr lvl="1"/>
@@ -1318,6 +1307,7 @@
               <a:rPr lang="en-US" smtClean="0"/>
               <a:t>Second level</a:t>
             </a:r>
+            <a:endParaRPr lang="en-US" smtClean="0"/>
           </a:p>
           <a:p>
             <a:pPr lvl="2"/>
@@ -1325,6 +1315,7 @@
               <a:rPr lang="en-US" smtClean="0"/>
               <a:t>Third level</a:t>
             </a:r>
+            <a:endParaRPr lang="en-US" smtClean="0"/>
           </a:p>
           <a:p>
             <a:pPr lvl="3"/>
@@ -1332,6 +1323,7 @@
               <a:rPr lang="en-US" smtClean="0"/>
               <a:t>Fourth level</a:t>
             </a:r>
+            <a:endParaRPr lang="en-US" smtClean="0"/>
           </a:p>
           <a:p>
             <a:pPr lvl="4"/>
@@ -1360,8 +1352,6 @@
           <a:p>
             <a:fld id="{5BCAD085-E8A6-8845-BD4E-CB4CCA059FC4}" type="datetimeFigureOut">
               <a:rPr lang="en-US" smtClean="0"/>
-              <a:pPr/>
-              <a:t>19-Jun-25</a:t>
             </a:fld>
             <a:endParaRPr lang="en-US"/>
           </a:p>
@@ -1403,19 +1393,12 @@
           <a:p>
             <a:fld id="{C1FF6DA9-008F-8B48-92A6-B652298478BF}" type="slidenum">
               <a:rPr lang="en-US" smtClean="0"/>
-              <a:pPr/>
-              <a:t>‹#›</a:t>
             </a:fld>
             <a:endParaRPr lang="en-US"/>
           </a:p>
         </p:txBody>
       </p:sp>
     </p:spTree>
-    <p:extLst>
-      <p:ext uri="{BB962C8B-B14F-4D97-AF65-F5344CB8AC3E}">
-        <p14:creationId xmlns:p14="http://schemas.microsoft.com/office/powerpoint/2010/main" xmlns="" val="2782244947"/>
-      </p:ext>
-    </p:extLst>
   </p:cSld>
   <p:clrMapOvr>
     <a:masterClrMapping/>
@@ -1529,6 +1512,7 @@
               <a:rPr lang="en-US" smtClean="0"/>
               <a:t>Click to edit Master text styles</a:t>
             </a:r>
+            <a:endParaRPr lang="en-US" smtClean="0"/>
           </a:p>
         </p:txBody>
       </p:sp>
@@ -1585,6 +1569,7 @@
               <a:rPr lang="en-US" smtClean="0"/>
               <a:t>Click to edit Master text styles</a:t>
             </a:r>
+            <a:endParaRPr lang="en-US" smtClean="0"/>
           </a:p>
           <a:p>
             <a:pPr lvl="1"/>
@@ -1592,6 +1577,7 @@
               <a:rPr lang="en-US" smtClean="0"/>
               <a:t>Second level</a:t>
             </a:r>
+            <a:endParaRPr lang="en-US" smtClean="0"/>
           </a:p>
           <a:p>
             <a:pPr lvl="2"/>
@@ -1599,6 +1585,7 @@
               <a:rPr lang="en-US" smtClean="0"/>
               <a:t>Third level</a:t>
             </a:r>
+            <a:endParaRPr lang="en-US" smtClean="0"/>
           </a:p>
           <a:p>
             <a:pPr lvl="3"/>
@@ -1606,6 +1593,7 @@
               <a:rPr lang="en-US" smtClean="0"/>
               <a:t>Fourth level</a:t>
             </a:r>
+            <a:endParaRPr lang="en-US" smtClean="0"/>
           </a:p>
           <a:p>
             <a:pPr lvl="4"/>
@@ -1679,6 +1667,7 @@
               <a:rPr lang="en-US" smtClean="0"/>
               <a:t>Click to edit Master text styles</a:t>
             </a:r>
+            <a:endParaRPr lang="en-US" smtClean="0"/>
           </a:p>
         </p:txBody>
       </p:sp>
@@ -1735,6 +1724,7 @@
               <a:rPr lang="en-US" smtClean="0"/>
               <a:t>Click to edit Master text styles</a:t>
             </a:r>
+            <a:endParaRPr lang="en-US" smtClean="0"/>
           </a:p>
           <a:p>
             <a:pPr lvl="1"/>
@@ -1742,6 +1732,7 @@
               <a:rPr lang="en-US" smtClean="0"/>
               <a:t>Second level</a:t>
             </a:r>
+            <a:endParaRPr lang="en-US" smtClean="0"/>
           </a:p>
           <a:p>
             <a:pPr lvl="2"/>
@@ -1749,6 +1740,7 @@
               <a:rPr lang="en-US" smtClean="0"/>
               <a:t>Third level</a:t>
             </a:r>
+            <a:endParaRPr lang="en-US" smtClean="0"/>
           </a:p>
           <a:p>
             <a:pPr lvl="3"/>
@@ -1756,6 +1748,7 @@
               <a:rPr lang="en-US" smtClean="0"/>
               <a:t>Fourth level</a:t>
             </a:r>
+            <a:endParaRPr lang="en-US" smtClean="0"/>
           </a:p>
           <a:p>
             <a:pPr lvl="4"/>
@@ -1784,8 +1777,6 @@
           <a:p>
             <a:fld id="{5BCAD085-E8A6-8845-BD4E-CB4CCA059FC4}" type="datetimeFigureOut">
               <a:rPr lang="en-US" smtClean="0"/>
-              <a:pPr/>
-              <a:t>19-Jun-25</a:t>
             </a:fld>
             <a:endParaRPr lang="en-US"/>
           </a:p>
@@ -1827,19 +1818,12 @@
           <a:p>
             <a:fld id="{C1FF6DA9-008F-8B48-92A6-B652298478BF}" type="slidenum">
               <a:rPr lang="en-US" smtClean="0"/>
-              <a:pPr/>
-              <a:t>‹#›</a:t>
             </a:fld>
             <a:endParaRPr lang="en-US"/>
           </a:p>
         </p:txBody>
       </p:sp>
     </p:spTree>
-    <p:extLst>
-      <p:ext uri="{BB962C8B-B14F-4D97-AF65-F5344CB8AC3E}">
-        <p14:creationId xmlns:p14="http://schemas.microsoft.com/office/powerpoint/2010/main" xmlns="" val="990158736"/>
-      </p:ext>
-    </p:extLst>
   </p:cSld>
   <p:clrMapOvr>
     <a:masterClrMapping/>
@@ -1904,8 +1888,6 @@
           <a:p>
             <a:fld id="{5BCAD085-E8A6-8845-BD4E-CB4CCA059FC4}" type="datetimeFigureOut">
               <a:rPr lang="en-US" smtClean="0"/>
-              <a:pPr/>
-              <a:t>19-Jun-25</a:t>
             </a:fld>
             <a:endParaRPr lang="en-US"/>
           </a:p>
@@ -1947,19 +1929,12 @@
           <a:p>
             <a:fld id="{C1FF6DA9-008F-8B48-92A6-B652298478BF}" type="slidenum">
               <a:rPr lang="en-US" smtClean="0"/>
-              <a:pPr/>
-              <a:t>‹#›</a:t>
             </a:fld>
             <a:endParaRPr lang="en-US"/>
           </a:p>
         </p:txBody>
       </p:sp>
     </p:spTree>
-    <p:extLst>
-      <p:ext uri="{BB962C8B-B14F-4D97-AF65-F5344CB8AC3E}">
-        <p14:creationId xmlns:p14="http://schemas.microsoft.com/office/powerpoint/2010/main" xmlns="" val="727027711"/>
-      </p:ext>
-    </p:extLst>
   </p:cSld>
   <p:clrMapOvr>
     <a:masterClrMapping/>
@@ -2001,8 +1976,6 @@
           <a:p>
             <a:fld id="{5BCAD085-E8A6-8845-BD4E-CB4CCA059FC4}" type="datetimeFigureOut">
               <a:rPr lang="en-US" smtClean="0"/>
-              <a:pPr/>
-              <a:t>19-Jun-25</a:t>
             </a:fld>
             <a:endParaRPr lang="en-US"/>
           </a:p>
@@ -2044,19 +2017,12 @@
           <a:p>
             <a:fld id="{C1FF6DA9-008F-8B48-92A6-B652298478BF}" type="slidenum">
               <a:rPr lang="en-US" smtClean="0"/>
-              <a:pPr/>
-              <a:t>‹#›</a:t>
             </a:fld>
             <a:endParaRPr lang="en-US"/>
           </a:p>
         </p:txBody>
       </p:sp>
     </p:spTree>
-    <p:extLst>
-      <p:ext uri="{BB962C8B-B14F-4D97-AF65-F5344CB8AC3E}">
-        <p14:creationId xmlns:p14="http://schemas.microsoft.com/office/powerpoint/2010/main" xmlns="" val="1212999818"/>
-      </p:ext>
-    </p:extLst>
   </p:cSld>
   <p:clrMapOvr>
     <a:masterClrMapping/>
@@ -2166,6 +2132,7 @@
               <a:rPr lang="en-US" smtClean="0"/>
               <a:t>Click to edit Master text styles</a:t>
             </a:r>
+            <a:endParaRPr lang="en-US" smtClean="0"/>
           </a:p>
           <a:p>
             <a:pPr lvl="1"/>
@@ -2173,6 +2140,7 @@
               <a:rPr lang="en-US" smtClean="0"/>
               <a:t>Second level</a:t>
             </a:r>
+            <a:endParaRPr lang="en-US" smtClean="0"/>
           </a:p>
           <a:p>
             <a:pPr lvl="2"/>
@@ -2180,6 +2148,7 @@
               <a:rPr lang="en-US" smtClean="0"/>
               <a:t>Third level</a:t>
             </a:r>
+            <a:endParaRPr lang="en-US" smtClean="0"/>
           </a:p>
           <a:p>
             <a:pPr lvl="3"/>
@@ -2187,6 +2156,7 @@
               <a:rPr lang="en-US" smtClean="0"/>
               <a:t>Fourth level</a:t>
             </a:r>
+            <a:endParaRPr lang="en-US" smtClean="0"/>
           </a:p>
           <a:p>
             <a:pPr lvl="4"/>
@@ -2260,6 +2230,7 @@
               <a:rPr lang="en-US" smtClean="0"/>
               <a:t>Click to edit Master text styles</a:t>
             </a:r>
+            <a:endParaRPr lang="en-US" smtClean="0"/>
           </a:p>
         </p:txBody>
       </p:sp>
@@ -2280,8 +2251,6 @@
           <a:p>
             <a:fld id="{5BCAD085-E8A6-8845-BD4E-CB4CCA059FC4}" type="datetimeFigureOut">
               <a:rPr lang="en-US" smtClean="0"/>
-              <a:pPr/>
-              <a:t>19-Jun-25</a:t>
             </a:fld>
             <a:endParaRPr lang="en-US"/>
           </a:p>
@@ -2323,19 +2292,12 @@
           <a:p>
             <a:fld id="{C1FF6DA9-008F-8B48-92A6-B652298478BF}" type="slidenum">
               <a:rPr lang="en-US" smtClean="0"/>
-              <a:pPr/>
-              <a:t>‹#›</a:t>
             </a:fld>
             <a:endParaRPr lang="en-US"/>
           </a:p>
         </p:txBody>
       </p:sp>
     </p:spTree>
-    <p:extLst>
-      <p:ext uri="{BB962C8B-B14F-4D97-AF65-F5344CB8AC3E}">
-        <p14:creationId xmlns:p14="http://schemas.microsoft.com/office/powerpoint/2010/main" xmlns="" val="1840726560"/>
-      </p:ext>
-    </p:extLst>
   </p:cSld>
   <p:clrMapOvr>
     <a:masterClrMapping/>
@@ -2515,6 +2477,7 @@
               <a:rPr lang="en-US" smtClean="0"/>
               <a:t>Click to edit Master text styles</a:t>
             </a:r>
+            <a:endParaRPr lang="en-US" smtClean="0"/>
           </a:p>
         </p:txBody>
       </p:sp>
@@ -2535,8 +2498,6 @@
           <a:p>
             <a:fld id="{5BCAD085-E8A6-8845-BD4E-CB4CCA059FC4}" type="datetimeFigureOut">
               <a:rPr lang="en-US" smtClean="0"/>
-              <a:pPr/>
-              <a:t>19-Jun-25</a:t>
             </a:fld>
             <a:endParaRPr lang="en-US"/>
           </a:p>
@@ -2578,19 +2539,12 @@
           <a:p>
             <a:fld id="{C1FF6DA9-008F-8B48-92A6-B652298478BF}" type="slidenum">
               <a:rPr lang="en-US" smtClean="0"/>
-              <a:pPr/>
-              <a:t>‹#›</a:t>
             </a:fld>
             <a:endParaRPr lang="en-US"/>
           </a:p>
         </p:txBody>
       </p:sp>
     </p:spTree>
-    <p:extLst>
-      <p:ext uri="{BB962C8B-B14F-4D97-AF65-F5344CB8AC3E}">
-        <p14:creationId xmlns:p14="http://schemas.microsoft.com/office/powerpoint/2010/main" xmlns="" val="3889236939"/>
-      </p:ext>
-    </p:extLst>
   </p:cSld>
   <p:clrMapOvr>
     <a:masterClrMapping/>
@@ -2683,6 +2637,7 @@
               <a:rPr lang="en-US" smtClean="0"/>
               <a:t>Click to edit Master text styles</a:t>
             </a:r>
+            <a:endParaRPr lang="en-US" smtClean="0"/>
           </a:p>
           <a:p>
             <a:pPr lvl="1"/>
@@ -2690,6 +2645,7 @@
               <a:rPr lang="en-US" smtClean="0"/>
               <a:t>Second level</a:t>
             </a:r>
+            <a:endParaRPr lang="en-US" smtClean="0"/>
           </a:p>
           <a:p>
             <a:pPr lvl="2"/>
@@ -2697,6 +2653,7 @@
               <a:rPr lang="en-US" smtClean="0"/>
               <a:t>Third level</a:t>
             </a:r>
+            <a:endParaRPr lang="en-US" smtClean="0"/>
           </a:p>
           <a:p>
             <a:pPr lvl="3"/>
@@ -2704,6 +2661,7 @@
               <a:rPr lang="en-US" smtClean="0"/>
               <a:t>Fourth level</a:t>
             </a:r>
+            <a:endParaRPr lang="en-US" smtClean="0"/>
           </a:p>
           <a:p>
             <a:pPr lvl="4"/>
@@ -2750,8 +2708,6 @@
           <a:p>
             <a:fld id="{5BCAD085-E8A6-8845-BD4E-CB4CCA059FC4}" type="datetimeFigureOut">
               <a:rPr lang="en-US" smtClean="0"/>
-              <a:pPr/>
-              <a:t>19-Jun-25</a:t>
             </a:fld>
             <a:endParaRPr lang="en-US"/>
           </a:p>
@@ -2829,19 +2785,12 @@
           <a:p>
             <a:fld id="{C1FF6DA9-008F-8B48-92A6-B652298478BF}" type="slidenum">
               <a:rPr lang="en-US" smtClean="0"/>
-              <a:pPr/>
-              <a:t>‹#›</a:t>
             </a:fld>
             <a:endParaRPr lang="en-US"/>
           </a:p>
         </p:txBody>
       </p:sp>
     </p:spTree>
-    <p:extLst>
-      <p:ext uri="{BB962C8B-B14F-4D97-AF65-F5344CB8AC3E}">
-        <p14:creationId xmlns:p14="http://schemas.microsoft.com/office/powerpoint/2010/main" xmlns="" val="2209977519"/>
-      </p:ext>
-    </p:extLst>
   </p:cSld>
   <p:clrMap bg1="lt1" tx1="dk1" bg2="lt2" tx2="dk2" accent1="accent1" accent2="accent2" accent3="accent3" accent4="accent4" accent5="accent5" accent6="accent6" hlink="hlink" folHlink="folHlink"/>
   <p:sldLayoutIdLst>
@@ -2879,7 +2828,7 @@
         <a:spcBef>
           <a:spcPct val="20000"/>
         </a:spcBef>
-        <a:buFont typeface="Arial"/>
+        <a:buFont typeface="Arial" panose="020B0604020202020204"/>
         <a:buChar char="•"/>
         <a:defRPr sz="3200" kern="1200">
           <a:solidFill>
@@ -2894,7 +2843,7 @@
         <a:spcBef>
           <a:spcPct val="20000"/>
         </a:spcBef>
-        <a:buFont typeface="Arial"/>
+        <a:buFont typeface="Arial" panose="020B0604020202020204"/>
         <a:buChar char="–"/>
         <a:defRPr sz="2800" kern="1200">
           <a:solidFill>
@@ -2909,7 +2858,7 @@
         <a:spcBef>
           <a:spcPct val="20000"/>
         </a:spcBef>
-        <a:buFont typeface="Arial"/>
+        <a:buFont typeface="Arial" panose="020B0604020202020204"/>
         <a:buChar char="•"/>
         <a:defRPr sz="2400" kern="1200">
           <a:solidFill>
@@ -2924,7 +2873,7 @@
         <a:spcBef>
           <a:spcPct val="20000"/>
         </a:spcBef>
-        <a:buFont typeface="Arial"/>
+        <a:buFont typeface="Arial" panose="020B0604020202020204"/>
         <a:buChar char="–"/>
         <a:defRPr sz="2000" kern="1200">
           <a:solidFill>
@@ -2939,7 +2888,7 @@
         <a:spcBef>
           <a:spcPct val="20000"/>
         </a:spcBef>
-        <a:buFont typeface="Arial"/>
+        <a:buFont typeface="Arial" panose="020B0604020202020204"/>
         <a:buChar char="»"/>
         <a:defRPr sz="2000" kern="1200">
           <a:solidFill>
@@ -2954,7 +2903,7 @@
         <a:spcBef>
           <a:spcPct val="20000"/>
         </a:spcBef>
-        <a:buFont typeface="Arial"/>
+        <a:buFont typeface="Arial" panose="020B0604020202020204"/>
         <a:buChar char="•"/>
         <a:defRPr sz="2000" kern="1200">
           <a:solidFill>
@@ -2969,7 +2918,7 @@
         <a:spcBef>
           <a:spcPct val="20000"/>
         </a:spcBef>
-        <a:buFont typeface="Arial"/>
+        <a:buFont typeface="Arial" panose="020B0604020202020204"/>
         <a:buChar char="•"/>
         <a:defRPr sz="2000" kern="1200">
           <a:solidFill>
@@ -2984,7 +2933,7 @@
         <a:spcBef>
           <a:spcPct val="20000"/>
         </a:spcBef>
-        <a:buFont typeface="Arial"/>
+        <a:buFont typeface="Arial" panose="020B0604020202020204"/>
         <a:buChar char="•"/>
         <a:defRPr sz="2000" kern="1200">
           <a:solidFill>
@@ -2999,7 +2948,7 @@
         <a:spcBef>
           <a:spcPct val="20000"/>
         </a:spcBef>
-        <a:buFont typeface="Arial"/>
+        <a:buFont typeface="Arial" panose="020B0604020202020204"/>
         <a:buChar char="•"/>
         <a:defRPr sz="2000" kern="1200">
           <a:solidFill>
@@ -3238,9 +3187,7 @@
               <a:t>Question: Is there a relationship between smoking and lung disease?</a:t>
             </a:r>
           </a:p>
-          <a:p>
-            <a:endParaRPr/>
-          </a:p>
+          <a:p/>
           <a:p>
             <a:r>
               <a:t>Observed Table:</a:t>
@@ -3256,9 +3203,7 @@
               <a:t>• Non-Smoker - Disease: 20 | No Disease: 80</a:t>
             </a:r>
           </a:p>
-          <a:p>
-            <a:endParaRPr/>
-          </a:p>
+          <a:p/>
           <a:p>
             <a:r>
               <a:t>Test: Association between smoking status and lung disease.</a:t>
@@ -3335,18 +3280,21 @@
               <a:rPr sz="2400"/>
               <a:t>Observed Table:</a:t>
             </a:r>
+            <a:endParaRPr sz="2400"/>
           </a:p>
           <a:p>
             <a:r>
               <a:rPr sz="2400"/>
               <a:t>Smoker: [Disease: 40, No Disease: 60]</a:t>
             </a:r>
+            <a:endParaRPr sz="2400"/>
           </a:p>
           <a:p>
             <a:r>
               <a:rPr sz="2400"/>
               <a:t>Non-Smoker: [Disease: 20, No Disease: 80]</a:t>
             </a:r>
+            <a:endParaRPr sz="2400"/>
           </a:p>
           <a:p>
             <a:endParaRPr sz="2400"/>
@@ -3356,18 +3304,21 @@
               <a:rPr sz="2400"/>
               <a:t>Expected values:</a:t>
             </a:r>
+            <a:endParaRPr sz="2400"/>
           </a:p>
           <a:p>
             <a:r>
               <a:rPr sz="2400"/>
               <a:t>• Total = 200, Disease = 60, No Disease = 140</a:t>
             </a:r>
+            <a:endParaRPr sz="2400"/>
           </a:p>
           <a:p>
             <a:r>
               <a:rPr sz="2400"/>
               <a:t>• Smoker Expected: [30, 70], Non-Smoker Expected: [30, 70]</a:t>
             </a:r>
+            <a:endParaRPr sz="2400"/>
           </a:p>
           <a:p>
             <a:endParaRPr sz="2400"/>
@@ -3377,12 +3328,14 @@
               <a:rPr sz="2400"/>
               <a:t>χ² = (40-30)²/30 + (60-70)²/70 + (20-30)²/30 + (80-70)²/70</a:t>
             </a:r>
+            <a:endParaRPr sz="2400"/>
           </a:p>
           <a:p>
             <a:r>
               <a:rPr sz="2400"/>
               <a:t>= 3.33 + 1.43 + 3.33 + 1.43 = 9.52</a:t>
             </a:r>
+            <a:endParaRPr sz="2400"/>
           </a:p>
           <a:p>
             <a:endParaRPr sz="2400"/>
@@ -3392,6 +3345,7 @@
               <a:rPr sz="2400"/>
               <a:t>df = 1 → Critical value (0.05) = 3.84 → Reject H₀</a:t>
             </a:r>
+            <a:endParaRPr sz="2400"/>
           </a:p>
         </p:txBody>
       </p:sp>
@@ -3464,9 +3418,7 @@
               <a:t>Question: Does education level affect voting behavior?</a:t>
             </a:r>
           </a:p>
-          <a:p>
-            <a:endParaRPr/>
-          </a:p>
+          <a:p/>
           <a:p>
             <a:r>
               <a:t>Observed Table:</a:t>
@@ -3487,9 +3439,7 @@
               <a:t>• Higher Education - Voted: 70 | Didn’t Vote: 30</a:t>
             </a:r>
           </a:p>
-          <a:p>
-            <a:endParaRPr/>
-          </a:p>
+          <a:p/>
           <a:p>
             <a:r>
               <a:t>Test: Association between education and voting.</a:t>
@@ -3571,9 +3521,7 @@
               <a:t>Primary: [25, 75], Secondary: [40, 60], Higher: [70, 30]</a:t>
             </a:r>
           </a:p>
-          <a:p>
-            <a:endParaRPr/>
-          </a:p>
+          <a:p/>
           <a:p>
             <a:r>
               <a:t>Expected values (computed from row/column totals)</a:t>
@@ -3589,9 +3537,7 @@
               <a:t>Calculate expected for each cell, apply formula</a:t>
             </a:r>
           </a:p>
-          <a:p>
-            <a:endParaRPr/>
-          </a:p>
+          <a:p/>
           <a:p>
             <a:r>
               <a:t>Assume χ² ≈ 35.6, df = (3-1)(2-1) = 2 → Critical (0.05) = 5.99</a:t>
@@ -3673,9 +3619,7 @@
               <a:t>Question: Does ad type affect product purchase?</a:t>
             </a:r>
           </a:p>
-          <a:p>
-            <a:endParaRPr/>
-          </a:p>
+          <a:p/>
           <a:p>
             <a:r>
               <a:t>Observed Table:</a:t>
@@ -3696,9 +3640,7 @@
               <a:t>• Newspaper Ad - Bought: 30 | Didn’t Buy: 70</a:t>
             </a:r>
           </a:p>
-          <a:p>
-            <a:endParaRPr/>
-          </a:p>
+          <a:p/>
           <a:p>
             <a:r>
               <a:t>Test: Association between ad type and customer buying behavior.</a:t>
@@ -3780,9 +3722,7 @@
               <a:t>TV: [50, 50], FB: [60, 40], Newspaper: [30, 70]</a:t>
             </a:r>
           </a:p>
-          <a:p>
-            <a:endParaRPr/>
-          </a:p>
+          <a:p/>
           <a:p>
             <a:r>
               <a:t>Expected calculated from totals</a:t>
@@ -3793,9 +3733,7 @@
               <a:t>χ² = Σ((O-E)²/E) for all 6 cells</a:t>
             </a:r>
           </a:p>
-          <a:p>
-            <a:endParaRPr/>
-          </a:p>
+          <a:p/>
           <a:p>
             <a:r>
               <a:t>Assume χ² ≈ 16.2, df = (3-1)(2-1) = 2 → Critical (0.05) = 5.99</a:t>
@@ -3877,9 +3815,7 @@
               <a:t>Question: Do men and women prefer different platforms?</a:t>
             </a:r>
           </a:p>
-          <a:p>
-            <a:endParaRPr/>
-          </a:p>
+          <a:p/>
           <a:p>
             <a:r>
               <a:t>Observed Table:</a:t>
@@ -3895,9 +3831,7 @@
               <a:t>• Female - Facebook: 50 | Instagram: 30 | YouTube: 20</a:t>
             </a:r>
           </a:p>
-          <a:p>
-            <a:endParaRPr/>
-          </a:p>
+          <a:p/>
           <a:p>
             <a:r>
               <a:t>Test: Association between gender and platform preference.</a:t>
@@ -3979,9 +3913,7 @@
               <a:t>Male: [30, 10, 40], Female: [50, 30, 20]</a:t>
             </a:r>
           </a:p>
-          <a:p>
-            <a:endParaRPr/>
-          </a:p>
+          <a:p/>
           <a:p>
             <a:r>
               <a:t>Expected calculated using row/column totals</a:t>
@@ -3992,12 +3924,21 @@
               <a:t>χ² = Σ((O-E)²/E) over 6 cells</a:t>
             </a:r>
           </a:p>
-          <a:p>
-            <a:endParaRPr/>
-          </a:p>
-          <a:p>
-            <a:r>
-              <a:t>Assume χ² ≈ 22.5, df = (2-1)(3-1) = 2 → Critical (0.05) = 5.99</a:t>
+          <a:p/>
+          <a:p>
+            <a:r>
+              <a:t>Assume </a:t>
+            </a:r>
+            <a:r>
+              <a:rPr>
+                <a:highlight>
+                  <a:srgbClr val="FFFF00"/>
+                </a:highlight>
+              </a:rPr>
+              <a:t>χ² ≈ 22.5</a:t>
+            </a:r>
+            <a:r>
+              <a:t>, df = (2-1)(3-1) = 2 → Critical (0.05) = 5.99</a:t>
             </a:r>
           </a:p>
           <a:p>
@@ -4331,6 +4272,10 @@
       </a:style>
     </a:lnDef>
   </a:objectDefaults>
-  <a:extraClrSchemeLst/>
+  <a:extLst>
+    <a:ext uri="{05A4C25C-085E-4340-85A3-A5531E510DB2}">
+      <thm15:themeFamily xmlns:thm15="http://schemas.microsoft.com/office/thememl/2012/main" name="Office Theme" id="{62F939B6-93AF-4DB8-9C6B-D6C7DFDC589F}" vid="{4A3C46E8-61CC-4603-A589-7422A47A8E4A}"/>
+    </a:ext>
+  </a:extLst>
 </a:theme>
 </file>